--- a/static/guide/02_パソコンの準備.pptx
+++ b/static/guide/02_パソコンの準備.pptx
@@ -2282,8 +2282,8 @@
         </p:nvSpPr>
         <p:spPr>
           <a:xfrm>
-            <a:off x="5394960" y="1051560"/>
-            <a:ext cx="3291840" cy="3017520"/>
+            <a:off x="5394960" y="868680"/>
+            <a:ext cx="3291840" cy="3520440"/>
           </a:xfrm>
           <a:prstGeom prst="rect">
             <a:avLst/>
@@ -2307,7 +2307,7 @@
         </p:nvSpPr>
         <p:spPr>
           <a:xfrm>
-            <a:off x="5623560" y="1207008"/>
+            <a:off x="5623560" y="1024128"/>
             <a:ext cx="2834640" cy="274320"/>
           </a:xfrm>
           <a:prstGeom prst="rect">
@@ -2332,7 +2332,7 @@
                 <a:ea typeface="Consolas" pitchFamily="34" charset="-122"/>
                 <a:cs typeface="Consolas" pitchFamily="34" charset="-120"/>
               </a:rPr>
-              <a:t>// 資料は 4 本</a:t>
+              <a:t>// 資料は 5 本</a:t>
             </a:r>
             <a:endParaRPr lang="en-US" sz="1000" dirty="0"/>
           </a:p>
@@ -2346,7 +2346,7 @@
         </p:nvSpPr>
         <p:spPr>
           <a:xfrm>
-            <a:off x="5623560" y="1600200"/>
+            <a:off x="5623560" y="1417320"/>
             <a:ext cx="411480" cy="237744"/>
           </a:xfrm>
           <a:prstGeom prst="rect">
@@ -2385,7 +2385,7 @@
         </p:nvSpPr>
         <p:spPr>
           <a:xfrm>
-            <a:off x="6035040" y="1600200"/>
+            <a:off x="6035040" y="1417320"/>
             <a:ext cx="2514600" cy="237744"/>
           </a:xfrm>
           <a:prstGeom prst="rect">
@@ -2424,7 +2424,7 @@
         </p:nvSpPr>
         <p:spPr>
           <a:xfrm>
-            <a:off x="6035040" y="1847088"/>
+            <a:off x="6035040" y="1664208"/>
             <a:ext cx="2514600" cy="201168"/>
           </a:xfrm>
           <a:prstGeom prst="rect">
@@ -2463,7 +2463,7 @@
         </p:nvSpPr>
         <p:spPr>
           <a:xfrm>
-            <a:off x="5623560" y="2203704"/>
+            <a:off x="5623560" y="2020824"/>
             <a:ext cx="411480" cy="237744"/>
           </a:xfrm>
           <a:prstGeom prst="rect">
@@ -2502,7 +2502,7 @@
         </p:nvSpPr>
         <p:spPr>
           <a:xfrm>
-            <a:off x="6035040" y="2203704"/>
+            <a:off x="6035040" y="2020824"/>
             <a:ext cx="2514600" cy="237744"/>
           </a:xfrm>
           <a:prstGeom prst="rect">
@@ -2541,7 +2541,7 @@
         </p:nvSpPr>
         <p:spPr>
           <a:xfrm>
-            <a:off x="6035040" y="2450592"/>
+            <a:off x="6035040" y="2267712"/>
             <a:ext cx="2514600" cy="201168"/>
           </a:xfrm>
           <a:prstGeom prst="rect">
@@ -2580,7 +2580,7 @@
         </p:nvSpPr>
         <p:spPr>
           <a:xfrm>
-            <a:off x="5486400" y="2752344"/>
+            <a:off x="5486400" y="2569464"/>
             <a:ext cx="3108960" cy="548640"/>
           </a:xfrm>
           <a:prstGeom prst="rect">
@@ -2605,7 +2605,7 @@
         </p:nvSpPr>
         <p:spPr>
           <a:xfrm>
-            <a:off x="5623560" y="2807208"/>
+            <a:off x="5623560" y="2624328"/>
             <a:ext cx="411480" cy="237744"/>
           </a:xfrm>
           <a:prstGeom prst="rect">
@@ -2644,7 +2644,7 @@
         </p:nvSpPr>
         <p:spPr>
           <a:xfrm>
-            <a:off x="6035040" y="2807208"/>
+            <a:off x="6035040" y="2624328"/>
             <a:ext cx="2514600" cy="237744"/>
           </a:xfrm>
           <a:prstGeom prst="rect">
@@ -2683,7 +2683,7 @@
         </p:nvSpPr>
         <p:spPr>
           <a:xfrm>
-            <a:off x="6035040" y="3054096"/>
+            <a:off x="6035040" y="2871216"/>
             <a:ext cx="2514600" cy="201168"/>
           </a:xfrm>
           <a:prstGeom prst="rect">
@@ -2722,7 +2722,7 @@
         </p:nvSpPr>
         <p:spPr>
           <a:xfrm>
-            <a:off x="5623560" y="3410712"/>
+            <a:off x="5623560" y="3227832"/>
             <a:ext cx="411480" cy="237744"/>
           </a:xfrm>
           <a:prstGeom prst="rect">
@@ -2761,7 +2761,7 @@
         </p:nvSpPr>
         <p:spPr>
           <a:xfrm>
-            <a:off x="6035040" y="3410712"/>
+            <a:off x="6035040" y="3227832"/>
             <a:ext cx="2514600" cy="237744"/>
           </a:xfrm>
           <a:prstGeom prst="rect">
@@ -2800,7 +2800,7 @@
         </p:nvSpPr>
         <p:spPr>
           <a:xfrm>
-            <a:off x="6035040" y="3657600"/>
+            <a:off x="6035040" y="3474720"/>
             <a:ext cx="2514600" cy="201168"/>
           </a:xfrm>
           <a:prstGeom prst="rect">
@@ -2826,6 +2826,123 @@
                 <a:cs typeface="Meiryo" pitchFamily="34" charset="-120"/>
               </a:rPr>
               <a:t>全員・毎日</a:t>
+            </a:r>
+            <a:endParaRPr lang="en-US" sz="900" dirty="0"/>
+          </a:p>
+        </p:txBody>
+      </p:sp>
+      <p:sp>
+        <p:nvSpPr>
+          <p:cNvPr id="23" name="Text 21"/>
+          <p:cNvSpPr txBox="1"/>
+          <p:nvPr/>
+        </p:nvSpPr>
+        <p:spPr>
+          <a:xfrm>
+            <a:off x="5623560" y="3831336"/>
+            <a:ext cx="411480" cy="237744"/>
+          </a:xfrm>
+          <a:prstGeom prst="rect">
+            <a:avLst/>
+          </a:prstGeom>
+          <a:noFill/>
+          <a:ln/>
+        </p:spPr>
+        <p:txBody>
+          <a:bodyPr wrap="square" lIns="0" tIns="0" rIns="0" bIns="0" rtlCol="0" anchor="t"/>
+          <a:lstStyle/>
+          <a:p>
+            <a:pPr indent="0" marL="0">
+              <a:buNone/>
+            </a:pPr>
+            <a:r>
+              <a:rPr lang="en-US" sz="1300" b="1" dirty="0">
+                <a:solidFill>
+                  <a:srgbClr val="B9CAD9"/>
+                </a:solidFill>
+                <a:latin typeface="Consolas" pitchFamily="34" charset="0"/>
+                <a:ea typeface="Consolas" pitchFamily="34" charset="-122"/>
+                <a:cs typeface="Consolas" pitchFamily="34" charset="-120"/>
+              </a:rPr>
+              <a:t>04</a:t>
+            </a:r>
+            <a:endParaRPr lang="en-US" sz="1300" dirty="0"/>
+          </a:p>
+        </p:txBody>
+      </p:sp>
+      <p:sp>
+        <p:nvSpPr>
+          <p:cNvPr id="24" name="Text 22"/>
+          <p:cNvSpPr txBox="1"/>
+          <p:nvPr/>
+        </p:nvSpPr>
+        <p:spPr>
+          <a:xfrm>
+            <a:off x="6035040" y="3831336"/>
+            <a:ext cx="2514600" cy="237744"/>
+          </a:xfrm>
+          <a:prstGeom prst="rect">
+            <a:avLst/>
+          </a:prstGeom>
+          <a:noFill/>
+          <a:ln/>
+        </p:spPr>
+        <p:txBody>
+          <a:bodyPr wrap="square" lIns="0" tIns="0" rIns="0" bIns="0" rtlCol="0" anchor="t"/>
+          <a:lstStyle/>
+          <a:p>
+            <a:pPr indent="0" marL="0">
+              <a:buNone/>
+            </a:pPr>
+            <a:r>
+              <a:rPr lang="en-US" sz="1150" b="1" dirty="0">
+                <a:solidFill>
+                  <a:srgbClr val="B9CAD9"/>
+                </a:solidFill>
+                <a:latin typeface="Meiryo" pitchFamily="34" charset="0"/>
+                <a:ea typeface="Meiryo" pitchFamily="34" charset="-122"/>
+                <a:cs typeface="Meiryo" pitchFamily="34" charset="-120"/>
+              </a:rPr>
+              <a:t>アプリケーション構成</a:t>
+            </a:r>
+            <a:endParaRPr lang="en-US" sz="1150" dirty="0"/>
+          </a:p>
+        </p:txBody>
+      </p:sp>
+      <p:sp>
+        <p:nvSpPr>
+          <p:cNvPr id="25" name="Text 23"/>
+          <p:cNvSpPr txBox="1"/>
+          <p:nvPr/>
+        </p:nvSpPr>
+        <p:spPr>
+          <a:xfrm>
+            <a:off x="6035040" y="4078224"/>
+            <a:ext cx="2514600" cy="201168"/>
+          </a:xfrm>
+          <a:prstGeom prst="rect">
+            <a:avLst/>
+          </a:prstGeom>
+          <a:noFill/>
+          <a:ln/>
+        </p:spPr>
+        <p:txBody>
+          <a:bodyPr wrap="square" lIns="0" tIns="0" rIns="0" bIns="0" rtlCol="0" anchor="t"/>
+          <a:lstStyle/>
+          <a:p>
+            <a:pPr indent="0" marL="0">
+              <a:buNone/>
+            </a:pPr>
+            <a:r>
+              <a:rPr lang="en-US" sz="900" dirty="0">
+                <a:solidFill>
+                  <a:srgbClr val="B9CAD9"/>
+                </a:solidFill>
+                <a:latin typeface="Meiryo" pitchFamily="34" charset="0"/>
+                <a:ea typeface="Meiryo" pitchFamily="34" charset="-122"/>
+                <a:cs typeface="Meiryo" pitchFamily="34" charset="-120"/>
+              </a:rPr>
+              <a:t>全員</a:t>
             </a:r>
             <a:endParaRPr lang="en-US" sz="900" dirty="0"/>
           </a:p>

--- a/static/guide/02_パソコンの準備.pptx
+++ b/static/guide/02_パソコンの準備.pptx
@@ -867,7 +867,7 @@
           <a:p>
             <a:r>
               <a:rPr lang="en-US" dirty="0"/>
-              <a:t>ここまでで準備は終わりです。毎日の始め方と変更の届け方は、資料 03 にあります。</a:t>
+              <a:t>ここまでで準備は終わりです。作業の始め方と変更の届け方は、資料 03 にあります。</a:t>
             </a:r>
             <a:endParaRPr lang="en-US" dirty="0"/>
           </a:p>
@@ -2825,7 +2825,7 @@
                 <a:ea typeface="Meiryo" pitchFamily="34" charset="-122"/>
                 <a:cs typeface="Meiryo" pitchFamily="34" charset="-120"/>
               </a:rPr>
-              <a:t>全員・毎日</a:t>
+              <a:t>全員</a:t>
             </a:r>
             <a:endParaRPr lang="en-US" sz="900" dirty="0"/>
           </a:p>
@@ -8691,7 +8691,7 @@
                 <a:ea typeface="Meiryo" pitchFamily="34" charset="-122"/>
                 <a:cs typeface="Meiryo" pitchFamily="34" charset="-120"/>
               </a:rPr>
-              <a:t>サイトが表示されたら準備は終わり。毎日の作業は資料 03「開発の進め方」へ。</a:t>
+              <a:t>サイトが表示されたら準備は終わり。作業の進め方は資料 03「開発の進め方」へ。</a:t>
             </a:r>
             <a:endParaRPr lang="en-US" sz="1050" dirty="0"/>
           </a:p>

--- a/static/guide/02_パソコンの準備.pptx
+++ b/static/guide/02_パソコンの準備.pptx
@@ -14335,7 +14335,7 @@
                 <a:ea typeface="Meiryo" pitchFamily="34" charset="-122"/>
                 <a:cs typeface="Meiryo" pitchFamily="34" charset="-120"/>
               </a:rPr>
-              <a:t>1 時間以内に開く</a:t>
+              <a:t>1 時間以内に。ボタンで Chat に入る</a:t>
             </a:r>
             <a:endParaRPr lang="en-US" sz="1000" dirty="0"/>
           </a:p>
@@ -14722,7 +14722,7 @@
                 <a:ea typeface="Meiryo" pitchFamily="34" charset="-122"/>
                 <a:cs typeface="Meiryo" pitchFamily="34" charset="-120"/>
               </a:rPr>
-              <a:t>WG の Chat に入る</a:t>
+              <a:t>WG の Chat を開く</a:t>
             </a:r>
             <a:endParaRPr lang="en-US" sz="1250" dirty="0"/>
           </a:p>
@@ -14761,7 +14761,7 @@
                 <a:ea typeface="Meiryo" pitchFamily="34" charset="-122"/>
                 <a:cs typeface="Meiryo" pitchFamily="34" charset="-120"/>
               </a:rPr>
-              <a:t>Classroom の授業の WG にあるリンクから</a:t>
+              <a:t>最後の画面の「Chat を開く」から</a:t>
             </a:r>
             <a:endParaRPr lang="en-US" sz="1000" dirty="0"/>
           </a:p>
